--- a/data/documents/pptx/reliability_qual_summary.pptx
+++ b/data/documents/pptx/reliability_qual_summary.pptx
@@ -3936,7 +3936,7 @@
             </a:r>
             <a:r>
               <a:rPr sz="1800" b="0" i="0"/>
-              <a:t> April 30, 2024</a:t>
+              <a:t> June 3, 2026</a:t>
             </a:r>
           </a:p>
         </p:txBody>
@@ -4301,7 +4301,7 @@
             </a:r>
             <a:r>
               <a:rPr sz="1600" b="1" i="0"/>
-              <a:t>3 FAILED (Lot LOT-V7-008)</a:t>
+              <a:t>3 FAILED (Lot LOT-V7-005)</a:t>
             </a:r>
             <a:r>
               <a:rPr sz="1600" b="0" i="0"/>
@@ -4352,7 +4352,7 @@
             <a:pPr lvl="1"/>
             <a:r>
               <a:rPr sz="1600" b="0" i="0"/>
-              <a:t>Units U042, U089, U115 suffered oxide blowout in 120µm IO clamp under sustained DC bias at 150°C.</a:t>
+              <a:t>Units U162, U189, U215 suffered oxide blowout in 120µm IO clamp under sustained DC bias at 150°C.</a:t>
             </a:r>
           </a:p>
           <a:p>
@@ -4439,7 +4439,7 @@
             <a:pPr lvl="1"/>
             <a:r>
               <a:rPr sz="1800" b="0" i="1"/>
-              <a:t>HTOL (168-Hour Accelerated Screen):</a:t>
+              <a:t>HTOL (168-Hour Interim Readout):</a:t>
             </a:r>
             <a:r>
               <a:rPr sz="1800" b="0" i="0"/>
@@ -4755,7 +4755,7 @@
             <a:pPr lvl="1"/>
             <a:r>
               <a:rPr sz="1600" b="0" i="0"/>
-              <a:t>8D Corrective Action CAR-2024-ND01 (Discipline D6) validated and closed.</a:t>
+              <a:t>8D Corrective Action CAR-2026-ND01 (Discipline D6) validated and closed.</a:t>
             </a:r>
           </a:p>
           <a:p>
@@ -4776,7 +4776,7 @@
             <a:pPr lvl="1"/>
             <a:r>
               <a:rPr sz="1600" b="0" i="0"/>
-              <a:t>Ready for NovaDrive Customer Audit presentation on May 12, 2024.</a:t>
+              <a:t>Supports conversion of NovaDrive's interim PSW (May 10, 2026 audit) to a full PSW.</a:t>
             </a:r>
           </a:p>
           <a:p>
